--- a/dist/초3/사회·역사/지역과공간/초3_사회·역사_지역과공간_01_우리고장의장소.pptx
+++ b/dist/초3/사회·역사/지역과공간/초3_사회·역사_지역과공간_01_우리고장의장소.pptx
@@ -122,13 +122,13 @@
   <p:extLst>
     <p:ext uri="{521415D9-36F7-43E2-AB2F-B90AF26B5E84}">
       <p14:sectionLst xmlns:p14="http://schemas.microsoft.com/office/powerpoint/2010/main">
-        <p14:section name="도입" id="{144246cd-4483-db05-e7ed-f13c07ef566a}">
+        <p14:section name="도입" id="{39e4a209-2c34-7426-629b-7dab3271f10f}">
           <p14:sldIdLst>
             <p14:sldId id="256"/>
             <p14:sldId id="257"/>
           </p14:sldIdLst>
         </p14:section>
-        <p14:section name="개념" id="{1955f4da-fb07-bba5-b5b1-ab83802ecc36}">
+        <p14:section name="개념" id="{e0ea822a-bc0d-fe0b-6d56-328ab269554e}">
           <p14:sldIdLst>
             <p14:sldId id="258"/>
             <p14:sldId id="260"/>
@@ -136,7 +136,7 @@
             <p14:sldId id="267"/>
           </p14:sldIdLst>
         </p14:section>
-        <p14:section name="연습" id="{593efd75-f71e-fde8-8cd6-a4ca07ae71b7}">
+        <p14:section name="연습" id="{f8cbeec3-a7f9-266f-060c-341c606cf6c1}">
           <p14:sldIdLst>
             <p14:sldId id="259"/>
             <p14:sldId id="262"/>
@@ -144,13 +144,13 @@
             <p14:sldId id="268"/>
           </p14:sldIdLst>
         </p14:section>
-        <p14:section name="개념" id="{6fc24e1d-c68b-7287-0f38-f4689b78c57c}">
+        <p14:section name="개념" id="{7996d9e5-159b-0f1c-64da-80912a35164f}">
           <p14:sldIdLst/>
         </p14:section>
-        <p14:section name="연습" id="{4f452b5b-7fbd-714d-e151-749f92526ed9}">
+        <p14:section name="연습" id="{96e1b0e5-9333-2d71-9b06-7480faa322a2}">
           <p14:sldIdLst/>
         </p14:section>
-        <p14:section name="확인" id="{511db930-b6d8-99de-9d5b-2a03b0774820}">
+        <p14:section name="확인" id="{6b0628f2-4166-a45a-f5b3-9df2380e5193}">
           <p14:sldIdLst>
             <p14:sldId id="264"/>
             <p14:sldId id="265"/>
@@ -158,21 +158,21 @@
             <p14:sldId id="269"/>
           </p14:sldIdLst>
         </p14:section>
-        <p14:section name="개념" id="{b8549f58-62b8-1ea1-a6f6-f48918a8a855}">
+        <p14:section name="개념" id="{95d47661-8eb6-e969-0b10-f68312d8edc6}">
           <p14:sldIdLst/>
         </p14:section>
-        <p14:section name="연습" id="{f7460bdf-ce8b-ab85-63b8-12e8b37f1be1}">
+        <p14:section name="연습" id="{792ea473-c1be-ab87-d3e3-6e36669bbd87}">
           <p14:sldIdLst/>
         </p14:section>
-        <p14:section name="확인" id="{5a94dad3-6b94-975c-1b47-acd686b7d88a}">
+        <p14:section name="확인" id="{c1906fb9-19cf-ef9f-b9a4-63c48de564d8}">
           <p14:sldIdLst/>
         </p14:section>
-        <p14:section name="정리" id="{237aefee-5a29-21b9-d96c-2a1ada0aa73b}">
+        <p14:section name="정리" id="{d0ad1edf-6deb-b3a2-a94a-796a4c789e87}">
           <p14:sldIdLst>
             <p14:sldId id="270"/>
           </p14:sldIdLst>
         </p14:section>
-        <p14:section name="보충" id="{bac2f7fe-884c-c82b-9686-5b8bb92d5198}">
+        <p14:section name="보충" id="{3d4b84b4-14dc-97cc-6d0a-b39902e1c752}">
           <p14:sldIdLst>
             <p14:sldId id="271"/>
           </p14:sldIdLst>

--- a/dist/초3/사회·역사/지역과공간/초3_사회·역사_지역과공간_01_우리고장의장소.pptx
+++ b/dist/초3/사회·역사/지역과공간/초3_사회·역사_지역과공간_01_우리고장의장소.pptx
@@ -122,13 +122,13 @@
   <p:extLst>
     <p:ext uri="{521415D9-36F7-43E2-AB2F-B90AF26B5E84}">
       <p14:sectionLst xmlns:p14="http://schemas.microsoft.com/office/powerpoint/2010/main">
-        <p14:section name="도입" id="{39e4a209-2c34-7426-629b-7dab3271f10f}">
+        <p14:section name="도입" id="{d10c86f9-8600-58c2-28c3-6ad8300c61fb}">
           <p14:sldIdLst>
             <p14:sldId id="256"/>
             <p14:sldId id="257"/>
           </p14:sldIdLst>
         </p14:section>
-        <p14:section name="개념" id="{e0ea822a-bc0d-fe0b-6d56-328ab269554e}">
+        <p14:section name="개념" id="{f65d8412-f21d-dc7b-3c60-eeb334d5a85e}">
           <p14:sldIdLst>
             <p14:sldId id="258"/>
             <p14:sldId id="260"/>
@@ -136,7 +136,7 @@
             <p14:sldId id="267"/>
           </p14:sldIdLst>
         </p14:section>
-        <p14:section name="연습" id="{f8cbeec3-a7f9-266f-060c-341c606cf6c1}">
+        <p14:section name="연습" id="{deb3fe45-d6f1-1e58-003d-3e338ed7c47f}">
           <p14:sldIdLst>
             <p14:sldId id="259"/>
             <p14:sldId id="262"/>
@@ -144,13 +144,13 @@
             <p14:sldId id="268"/>
           </p14:sldIdLst>
         </p14:section>
-        <p14:section name="개념" id="{7996d9e5-159b-0f1c-64da-80912a35164f}">
+        <p14:section name="개념" id="{b5fddc90-327a-13ff-c6ef-49ceca0b33f5}">
           <p14:sldIdLst/>
         </p14:section>
-        <p14:section name="연습" id="{96e1b0e5-9333-2d71-9b06-7480faa322a2}">
+        <p14:section name="연습" id="{3fec49ca-9d66-7af3-507b-7c7cc9ded0fb}">
           <p14:sldIdLst/>
         </p14:section>
-        <p14:section name="확인" id="{6b0628f2-4166-a45a-f5b3-9df2380e5193}">
+        <p14:section name="확인" id="{0b54c3aa-a894-8112-12a2-6b73c852a3f8}">
           <p14:sldIdLst>
             <p14:sldId id="264"/>
             <p14:sldId id="265"/>
@@ -158,21 +158,21 @@
             <p14:sldId id="269"/>
           </p14:sldIdLst>
         </p14:section>
-        <p14:section name="개념" id="{95d47661-8eb6-e969-0b10-f68312d8edc6}">
+        <p14:section name="개념" id="{90958248-5c8c-08d4-7553-bc890d45971c}">
           <p14:sldIdLst/>
         </p14:section>
-        <p14:section name="연습" id="{792ea473-c1be-ab87-d3e3-6e36669bbd87}">
+        <p14:section name="연습" id="{a54909e1-ae4c-0288-5213-217bae611f59}">
           <p14:sldIdLst/>
         </p14:section>
-        <p14:section name="확인" id="{c1906fb9-19cf-ef9f-b9a4-63c48de564d8}">
+        <p14:section name="확인" id="{db38cc59-4986-17d0-86ca-06c5597a16f2}">
           <p14:sldIdLst/>
         </p14:section>
-        <p14:section name="정리" id="{d0ad1edf-6deb-b3a2-a94a-796a4c789e87}">
+        <p14:section name="정리" id="{b53e721f-dd1f-c7ce-d47a-630b2903936d}">
           <p14:sldIdLst>
             <p14:sldId id="270"/>
           </p14:sldIdLst>
         </p14:section>
-        <p14:section name="보충" id="{3d4b84b4-14dc-97cc-6d0a-b39902e1c752}">
+        <p14:section name="보충" id="{111454d1-d822-1a6a-e9a8-90ee2bfea2ac}">
           <p14:sldIdLst>
             <p14:sldId id="271"/>
           </p14:sldIdLst>

--- a/dist/초3/사회·역사/지역과공간/초3_사회·역사_지역과공간_01_우리고장의장소.pptx
+++ b/dist/초3/사회·역사/지역과공간/초3_사회·역사_지역과공간_01_우리고장의장소.pptx
@@ -122,13 +122,13 @@
   <p:extLst>
     <p:ext uri="{521415D9-36F7-43E2-AB2F-B90AF26B5E84}">
       <p14:sectionLst xmlns:p14="http://schemas.microsoft.com/office/powerpoint/2010/main">
-        <p14:section name="도입" id="{d10c86f9-8600-58c2-28c3-6ad8300c61fb}">
+        <p14:section name="도입" id="{71947fc0-426e-8357-d7c5-2eb8042a2ade}">
           <p14:sldIdLst>
             <p14:sldId id="256"/>
             <p14:sldId id="257"/>
           </p14:sldIdLst>
         </p14:section>
-        <p14:section name="개념" id="{f65d8412-f21d-dc7b-3c60-eeb334d5a85e}">
+        <p14:section name="개념" id="{af23b20a-0d04-28d9-71c0-0edb523089b1}">
           <p14:sldIdLst>
             <p14:sldId id="258"/>
             <p14:sldId id="260"/>
@@ -136,7 +136,7 @@
             <p14:sldId id="267"/>
           </p14:sldIdLst>
         </p14:section>
-        <p14:section name="연습" id="{deb3fe45-d6f1-1e58-003d-3e338ed7c47f}">
+        <p14:section name="연습" id="{c2c3161b-94eb-5e46-a2f4-69984770476d}">
           <p14:sldIdLst>
             <p14:sldId id="259"/>
             <p14:sldId id="262"/>
@@ -144,13 +144,13 @@
             <p14:sldId id="268"/>
           </p14:sldIdLst>
         </p14:section>
-        <p14:section name="개념" id="{b5fddc90-327a-13ff-c6ef-49ceca0b33f5}">
+        <p14:section name="개념" id="{cf6603a4-8100-1170-896d-ccdf37e31064}">
           <p14:sldIdLst/>
         </p14:section>
-        <p14:section name="연습" id="{3fec49ca-9d66-7af3-507b-7c7cc9ded0fb}">
+        <p14:section name="연습" id="{ccad27e3-7655-acbc-7919-0e198e24b6db}">
           <p14:sldIdLst/>
         </p14:section>
-        <p14:section name="확인" id="{0b54c3aa-a894-8112-12a2-6b73c852a3f8}">
+        <p14:section name="확인" id="{7d1f066e-86ed-ec2e-465d-ab2f46fdd9f4}">
           <p14:sldIdLst>
             <p14:sldId id="264"/>
             <p14:sldId id="265"/>
@@ -158,21 +158,21 @@
             <p14:sldId id="269"/>
           </p14:sldIdLst>
         </p14:section>
-        <p14:section name="개념" id="{90958248-5c8c-08d4-7553-bc890d45971c}">
+        <p14:section name="개념" id="{f39baa3e-0cde-69af-83e6-aac94132fe86}">
           <p14:sldIdLst/>
         </p14:section>
-        <p14:section name="연습" id="{a54909e1-ae4c-0288-5213-217bae611f59}">
+        <p14:section name="연습" id="{32b47b8c-2a66-df05-f52f-8897c9b3ce0d}">
           <p14:sldIdLst/>
         </p14:section>
-        <p14:section name="확인" id="{db38cc59-4986-17d0-86ca-06c5597a16f2}">
+        <p14:section name="확인" id="{408275b9-a929-eddc-24dc-31dd33b56f84}">
           <p14:sldIdLst/>
         </p14:section>
-        <p14:section name="정리" id="{b53e721f-dd1f-c7ce-d47a-630b2903936d}">
+        <p14:section name="정리" id="{6f48b009-9d7d-b0ab-f1c2-6da3326a840f}">
           <p14:sldIdLst>
             <p14:sldId id="270"/>
           </p14:sldIdLst>
         </p14:section>
-        <p14:section name="보충" id="{111454d1-d822-1a6a-e9a8-90ee2bfea2ac}">
+        <p14:section name="보충" id="{3231c935-fb20-16ff-a84d-b7d82a90af29}">
           <p14:sldIdLst>
             <p14:sldId id="271"/>
           </p14:sldIdLst>
@@ -1299,7 +1299,7 @@
 막히면
 - 아이 등 뒤에 인형을 두고 “돌아보지 않고 보이는 곳이 앞, 돌아봐야 보이는 곳이 뒤야.”라고 알려 줍니다.
 주의
-- 이 차시는 계획상 앞 차시가 없습니다. 보충 뒤에도 앞·뒤·옆이 흔들리면 며칠 동안 생활 속에서 “신발장 옆에 있어.”처럼 기준을 넣어 말하는 놀이를 한 뒤 S02부터 다시 시작합니다.
+- 보충 뒤에도 앞·뒤·옆이 흔들리면 며칠 동안 생활 속에서 “신발장 옆에 있어.”처럼 기준을 넣어 말하는 놀이를 한 뒤 S02부터 다시 시작합니다.
 - 보충이 오래 걸리면 오늘은 여기까지 하고 다음 날 S02부터 다시 시작합니다.</a:t>
             </a:r>
             <a:endParaRPr lang="en-US" dirty="0"/>
@@ -1399,7 +1399,7 @@
 - ③ 얼굴이 향한 쪽을 앞으로, 등 쪽을 뒤로 가리킵니다.
 막히면
 - “어제 엄마(아빠)랑 어디 갔었지?”처럼 최근 경험을 짚어 줍니다.
-- 장소 이름을 거의 말하지 못하거나 앞·뒤를 헷갈리면 S16(보충)을 먼저 합니다. 이 차시는 계획상 앞 차시가 없습니다. 보충으로도 어려우면 집 둘레를 함께 한 바퀴 걸으며 장소 이름을 말해 본 뒤 다시 시작합니다(2학년 ‘마을의 시설’과 가까운 내용입니다).
+- 장소 이름을 거의 말하지 못하거나 앞·뒤를 헷갈리면 S16(보충)을 먼저 합니다. 보충으로도 어려우면 집 둘레를 함께 한 바퀴 걸으며 장소 이름을 말해 본 뒤 다시 시작합니다(앞 차시는 2학년 ‘마을의 시설’입니다).
 주의
 - 장소 이름은 편의점, 마트, 태권도장처럼 무엇이든 괜찮습니다. 오늘 배울 여섯 장소가 아니어도 됩니다.</a:t>
             </a:r>
